--- a/docs/제출/모두봄-예선산출물-작성본.pptx
+++ b/docs/제출/모두봄-예선산출물-작성본.pptx
@@ -11225,7 +11225,7 @@
                 <a:latin typeface="맑은 고딕"/>
                 <a:ea typeface="맑은 고딕"/>
               </a:rPr>
-              <a:t>※ 7/15 완성 예정.</a:t>
+              <a:t/>
             </a:r>
           </a:p>
           <a:p>
@@ -11294,6 +11294,124 @@
                 <a:ea typeface="맑은 고딕"/>
               </a:rPr>
               <a:t>데이터 최신성: ETL 재수집 파이프라인 + 실측 검증 운영(정부 사이트의 정책 ID 재배정을 실측으로 잡아 정정한 사례 보유)</a:t>
+            </a:r>
+          </a:p>
+        </p:txBody>
+      </p:sp>
+      <p:pic>
+        <p:nvPicPr>
+          <p:cNvPr id="1023" name="Picture 1022" descr="20-fin-search.png"/>
+          <p:cNvPicPr>
+            <a:picLocks noChangeAspect="1"/>
+          </p:cNvPicPr>
+          <p:nvPr/>
+        </p:nvPicPr>
+        <p:blipFill>
+          <a:blip r:embed="rId4"/>
+          <a:stretch>
+            <a:fillRect/>
+          </a:stretch>
+        </p:blipFill>
+        <p:spPr>
+          <a:xfrm>
+            <a:off x="822960" y="3840480"/>
+            <a:ext cx="2991104" cy="2103120"/>
+          </a:xfrm>
+          <a:prstGeom prst="rect">
+            <a:avLst/>
+          </a:prstGeom>
+        </p:spPr>
+      </p:pic>
+      <p:sp>
+        <p:nvSpPr>
+          <p:cNvPr id="1024" name="TextBox 1023"/>
+          <p:cNvSpPr txBox="1"/>
+          <p:nvPr/>
+        </p:nvSpPr>
+        <p:spPr>
+          <a:xfrm>
+            <a:off x="822960" y="6053328"/>
+            <a:ext cx="4937760" cy="256032"/>
+          </a:xfrm>
+          <a:prstGeom prst="rect">
+            <a:avLst/>
+          </a:prstGeom>
+          <a:noFill/>
+        </p:spPr>
+        <p:txBody>
+          <a:bodyPr wrap="none">
+            <a:spAutoFit/>
+          </a:bodyPr>
+          <a:lstStyle/>
+          <a:p>
+            <a:r>
+              <a:rPr sz="900" b="0">
+                <a:solidFill>
+                  <a:srgbClr val="555F58"/>
+                </a:solidFill>
+                <a:latin typeface="맑은 고딕"/>
+                <a:ea typeface="맑은 고딕"/>
+              </a:rPr>
+              <a:t>▲ 5,200여 건 통합 탐색 — 서민금융(햇살론 등)까지 커버(2026 실측 검증)</a:t>
+            </a:r>
+          </a:p>
+        </p:txBody>
+      </p:sp>
+      <p:pic>
+        <p:nvPicPr>
+          <p:cNvPr id="1025" name="Picture 1024" descr="m4-elderly-on.png"/>
+          <p:cNvPicPr>
+            <a:picLocks noChangeAspect="1"/>
+          </p:cNvPicPr>
+          <p:nvPr/>
+        </p:nvPicPr>
+        <p:blipFill>
+          <a:blip r:embed="rId5"/>
+          <a:stretch>
+            <a:fillRect/>
+          </a:stretch>
+        </p:blipFill>
+        <p:spPr>
+          <a:xfrm>
+            <a:off x="6309360" y="3703320"/>
+            <a:ext cx="1077454" cy="2331720"/>
+          </a:xfrm>
+          <a:prstGeom prst="rect">
+            <a:avLst/>
+          </a:prstGeom>
+        </p:spPr>
+      </p:pic>
+      <p:sp>
+        <p:nvSpPr>
+          <p:cNvPr id="1026" name="TextBox 1025"/>
+          <p:cNvSpPr txBox="1"/>
+          <p:nvPr/>
+        </p:nvSpPr>
+        <p:spPr>
+          <a:xfrm>
+            <a:off x="6309360" y="6108192"/>
+            <a:ext cx="3108960" cy="256032"/>
+          </a:xfrm>
+          <a:prstGeom prst="rect">
+            <a:avLst/>
+          </a:prstGeom>
+          <a:noFill/>
+        </p:spPr>
+        <p:txBody>
+          <a:bodyPr wrap="none">
+            <a:spAutoFit/>
+          </a:bodyPr>
+          <a:lstStyle/>
+          <a:p>
+            <a:r>
+              <a:rPr sz="900" b="0">
+                <a:solidFill>
+                  <a:srgbClr val="555F58"/>
+                </a:solidFill>
+                <a:latin typeface="맑은 고딕"/>
+                <a:ea typeface="맑은 고딕"/>
+              </a:rPr>
+              <a:t>▲ 큰글씨·음성 읽어주기 — 접근성 우선 설계</a:t>
             </a:r>
           </a:p>
         </p:txBody>
@@ -16679,7 +16797,7 @@
                 <a:latin typeface="맑은 고딕"/>
                 <a:ea typeface="맑은 고딕"/>
               </a:rPr>
-              <a:t>※ 7/15 최종 산출물 제출 시 완성하는 영역 — 아래는 초안. 대표 화면 스크린샷 2장(한 문장 분석 결과·챗 브리핑)과 QR 삽입 예정.</a:t>
+              <a:t/>
             </a:r>
           </a:p>
           <a:p>
@@ -16750,7 +16868,125 @@
                 <a:latin typeface="맑은 고딕"/>
                 <a:ea typeface="맑은 고딕"/>
               </a:rPr>
-              <a:t>설치 없이 지금 바로 체험: https://biocode67.github.io/modoo-bom/ (QR 삽입 예정 — 로그인 불필요, PWA 설치 가능)</a:t>
+              <a:t/>
+            </a:r>
+          </a:p>
+        </p:txBody>
+      </p:sp>
+      <p:pic>
+        <p:nvPicPr>
+          <p:cNvPr id="1019" name="Picture 1018" descr="10-result-top.png"/>
+          <p:cNvPicPr>
+            <a:picLocks noChangeAspect="1"/>
+          </p:cNvPicPr>
+          <p:nvPr/>
+        </p:nvPicPr>
+        <p:blipFill>
+          <a:blip r:embed="rId4"/>
+          <a:stretch>
+            <a:fillRect/>
+          </a:stretch>
+        </p:blipFill>
+        <p:spPr>
+          <a:xfrm>
+            <a:off x="822960" y="3703320"/>
+            <a:ext cx="3251200" cy="2286000"/>
+          </a:xfrm>
+          <a:prstGeom prst="rect">
+            <a:avLst/>
+          </a:prstGeom>
+        </p:spPr>
+      </p:pic>
+      <p:sp>
+        <p:nvSpPr>
+          <p:cNvPr id="1020" name="TextBox 1019"/>
+          <p:cNvSpPr txBox="1"/>
+          <p:nvPr/>
+        </p:nvSpPr>
+        <p:spPr>
+          <a:xfrm>
+            <a:off x="822960" y="6053328"/>
+            <a:ext cx="4206240" cy="256032"/>
+          </a:xfrm>
+          <a:prstGeom prst="rect">
+            <a:avLst/>
+          </a:prstGeom>
+          <a:noFill/>
+        </p:spPr>
+        <p:txBody>
+          <a:bodyPr wrap="none">
+            <a:spAutoFit/>
+          </a:bodyPr>
+          <a:lstStyle/>
+          <a:p>
+            <a:r>
+              <a:rPr sz="900" b="0">
+                <a:solidFill>
+                  <a:srgbClr val="555F58"/>
+                </a:solidFill>
+                <a:latin typeface="맑은 고딕"/>
+                <a:ea typeface="맑은 고딕"/>
+              </a:rPr>
+              <a:t>▲ "72세 혼자 살아요" 한 문장 → 맞춤 37건·월 최대 64만원(실화면)</a:t>
+            </a:r>
+          </a:p>
+        </p:txBody>
+      </p:sp>
+      <p:pic>
+        <p:nvPicPr>
+          <p:cNvPr id="1021" name="Picture 1020" descr="qr-live.png"/>
+          <p:cNvPicPr>
+            <a:picLocks noChangeAspect="1"/>
+          </p:cNvPicPr>
+          <p:nvPr/>
+        </p:nvPicPr>
+        <p:blipFill>
+          <a:blip r:embed="rId5"/>
+          <a:stretch>
+            <a:fillRect/>
+          </a:stretch>
+        </p:blipFill>
+        <p:spPr>
+          <a:xfrm>
+            <a:off x="9692640" y="3794760"/>
+            <a:ext cx="1737360" cy="1737360"/>
+          </a:xfrm>
+          <a:prstGeom prst="rect">
+            <a:avLst/>
+          </a:prstGeom>
+        </p:spPr>
+      </p:pic>
+      <p:sp>
+        <p:nvSpPr>
+          <p:cNvPr id="1022" name="TextBox 1021"/>
+          <p:cNvSpPr txBox="1"/>
+          <p:nvPr/>
+        </p:nvSpPr>
+        <p:spPr>
+          <a:xfrm>
+            <a:off x="9464040" y="5596128"/>
+            <a:ext cx="2377440" cy="256032"/>
+          </a:xfrm>
+          <a:prstGeom prst="rect">
+            <a:avLst/>
+          </a:prstGeom>
+          <a:noFill/>
+        </p:spPr>
+        <p:txBody>
+          <a:bodyPr wrap="none">
+            <a:spAutoFit/>
+          </a:bodyPr>
+          <a:lstStyle/>
+          <a:p>
+            <a:r>
+              <a:rPr sz="900" b="0">
+                <a:solidFill>
+                  <a:srgbClr val="555F58"/>
+                </a:solidFill>
+                <a:latin typeface="맑은 고딕"/>
+                <a:ea typeface="맑은 고딕"/>
+              </a:rPr>
+              <a:t>QR — 설치·로그인 없이 바로 체험</a:t>
             </a:r>
           </a:p>
         </p:txBody>
@@ -18210,7 +18446,7 @@
                 <a:latin typeface="맑은 고딕"/>
                 <a:ea typeface="맑은 고딕"/>
               </a:rPr>
-              <a:t>※ 7/15 완성 예정 — 기능별 입력→결과 스크린샷 삽입 예정.</a:t>
+              <a:t/>
             </a:r>
           </a:p>
           <a:p>
@@ -18279,6 +18515,124 @@
                 <a:ea typeface="맑은 고딕"/>
               </a:rPr>
               <a:t>생활 도구: 기초생활 급여 계산기(2026 공식값) · 복지 캘린더(.ics) · 결과 인쇄/PDF · 이미지 카드 공유</a:t>
+            </a:r>
+          </a:p>
+        </p:txBody>
+      </p:sp>
+      <p:pic>
+        <p:nvPicPr>
+          <p:cNvPr id="1021" name="Picture 1020" descr="31-chat-mid.png"/>
+          <p:cNvPicPr>
+            <a:picLocks noChangeAspect="1"/>
+          </p:cNvPicPr>
+          <p:nvPr/>
+        </p:nvPicPr>
+        <p:blipFill>
+          <a:blip r:embed="rId4"/>
+          <a:stretch>
+            <a:fillRect/>
+          </a:stretch>
+        </p:blipFill>
+        <p:spPr>
+          <a:xfrm>
+            <a:off x="822960" y="3703320"/>
+            <a:ext cx="3251200" cy="2286000"/>
+          </a:xfrm>
+          <a:prstGeom prst="rect">
+            <a:avLst/>
+          </a:prstGeom>
+        </p:spPr>
+      </p:pic>
+      <p:sp>
+        <p:nvSpPr>
+          <p:cNvPr id="1022" name="TextBox 1021"/>
+          <p:cNvSpPr txBox="1"/>
+          <p:nvPr/>
+        </p:nvSpPr>
+        <p:spPr>
+          <a:xfrm>
+            <a:off x="822960" y="6053328"/>
+            <a:ext cx="4389120" cy="256032"/>
+          </a:xfrm>
+          <a:prstGeom prst="rect">
+            <a:avLst/>
+          </a:prstGeom>
+          <a:noFill/>
+        </p:spPr>
+        <p:txBody>
+          <a:bodyPr wrap="none">
+            <a:spAutoFit/>
+          </a:bodyPr>
+          <a:lstStyle/>
+          <a:p>
+            <a:r>
+              <a:rPr sz="900" b="0">
+                <a:solidFill>
+                  <a:srgbClr val="555F58"/>
+                </a:solidFill>
+                <a:latin typeface="맑은 고딕"/>
+                <a:ea typeface="맑은 고딕"/>
+              </a:rPr>
+              <a:t>▲ 새싹이와 대화로 입력(폼 없음) — 어르신 선택 시 큰글씨 제안</a:t>
+            </a:r>
+          </a:p>
+        </p:txBody>
+      </p:sp>
+      <p:pic>
+        <p:nvPicPr>
+          <p:cNvPr id="1023" name="Picture 1022" descr="13-doc-center.png"/>
+          <p:cNvPicPr>
+            <a:picLocks noChangeAspect="1"/>
+          </p:cNvPicPr>
+          <p:nvPr/>
+        </p:nvPicPr>
+        <p:blipFill>
+          <a:blip r:embed="rId5"/>
+          <a:stretch>
+            <a:fillRect/>
+          </a:stretch>
+        </p:blipFill>
+        <p:spPr>
+          <a:xfrm>
+            <a:off x="6035040" y="3703320"/>
+            <a:ext cx="3251200" cy="2286000"/>
+          </a:xfrm>
+          <a:prstGeom prst="rect">
+            <a:avLst/>
+          </a:prstGeom>
+        </p:spPr>
+      </p:pic>
+      <p:sp>
+        <p:nvSpPr>
+          <p:cNvPr id="1024" name="TextBox 1023"/>
+          <p:cNvSpPr txBox="1"/>
+          <p:nvPr/>
+        </p:nvSpPr>
+        <p:spPr>
+          <a:xfrm>
+            <a:off x="6035040" y="6053328"/>
+            <a:ext cx="4206240" cy="256032"/>
+          </a:xfrm>
+          <a:prstGeom prst="rect">
+            <a:avLst/>
+          </a:prstGeom>
+          <a:noFill/>
+        </p:spPr>
+        <p:txBody>
+          <a:bodyPr wrap="none">
+            <a:spAutoFit/>
+          </a:bodyPr>
+          <a:lstStyle/>
+          <a:p>
+            <a:r>
+              <a:rPr sz="900" b="0">
+                <a:solidFill>
+                  <a:srgbClr val="555F58"/>
+                </a:solidFill>
+                <a:latin typeface="맑은 고딕"/>
+                <a:ea typeface="맑은 고딕"/>
+              </a:rPr>
+              <a:t>▲ 서류 준비 도우미·에이전트 자동화(발급·신청 대행)</a:t>
             </a:r>
           </a:p>
         </p:txBody>
@@ -18974,7 +19328,7 @@
                 <a:latin typeface="맑은 고딕"/>
                 <a:ea typeface="맑은 고딕"/>
               </a:rPr>
-              <a:t>※ 7/15 완성 예정 — 단계별 화면 캡처 흐름도 삽입 예정.</a:t>
+              <a:t/>
             </a:r>
           </a:p>
           <a:p>
@@ -19043,6 +19397,183 @@
                 <a:ea typeface="맑은 고딕"/>
               </a:rPr>
               <a:t>예외 상황 대응: 백엔드 없음→규칙 폴백으로 전 기능 동작 · RPA 실패→화면 안내+공식 링크 폴백(멈춤 없음) · 오프라인→PWA 캐시로 동작</a:t>
+            </a:r>
+          </a:p>
+        </p:txBody>
+      </p:sp>
+      <p:pic>
+        <p:nvPicPr>
+          <p:cNvPr id="1022" name="Picture 1021" descr="m1-home.png"/>
+          <p:cNvPicPr>
+            <a:picLocks noChangeAspect="1"/>
+          </p:cNvPicPr>
+          <p:nvPr/>
+        </p:nvPicPr>
+        <p:blipFill>
+          <a:blip r:embed="rId4"/>
+          <a:stretch>
+            <a:fillRect/>
+          </a:stretch>
+        </p:blipFill>
+        <p:spPr>
+          <a:xfrm>
+            <a:off x="1920240" y="3383280"/>
+            <a:ext cx="1246466" cy="2697480"/>
+          </a:xfrm>
+          <a:prstGeom prst="rect">
+            <a:avLst/>
+          </a:prstGeom>
+        </p:spPr>
+      </p:pic>
+      <p:sp>
+        <p:nvSpPr>
+          <p:cNvPr id="1023" name="TextBox 1022"/>
+          <p:cNvSpPr txBox="1"/>
+          <p:nvPr/>
+        </p:nvSpPr>
+        <p:spPr>
+          <a:xfrm>
+            <a:off x="1828800" y="6108192"/>
+            <a:ext cx="1828800" cy="256032"/>
+          </a:xfrm>
+          <a:prstGeom prst="rect">
+            <a:avLst/>
+          </a:prstGeom>
+          <a:noFill/>
+        </p:spPr>
+        <p:txBody>
+          <a:bodyPr wrap="none">
+            <a:spAutoFit/>
+          </a:bodyPr>
+          <a:lstStyle/>
+          <a:p>
+            <a:r>
+              <a:rPr sz="900" b="0">
+                <a:solidFill>
+                  <a:srgbClr val="555F58"/>
+                </a:solidFill>
+                <a:latin typeface="맑은 고딕"/>
+                <a:ea typeface="맑은 고딕"/>
+              </a:rPr>
+              <a:t>▲ 모바일 홈(PWA)</a:t>
+            </a:r>
+          </a:p>
+        </p:txBody>
+      </p:sp>
+      <p:pic>
+        <p:nvPicPr>
+          <p:cNvPr id="1024" name="Picture 1023" descr="m5-result.png"/>
+          <p:cNvPicPr>
+            <a:picLocks noChangeAspect="1"/>
+          </p:cNvPicPr>
+          <p:nvPr/>
+        </p:nvPicPr>
+        <p:blipFill>
+          <a:blip r:embed="rId5"/>
+          <a:stretch>
+            <a:fillRect/>
+          </a:stretch>
+        </p:blipFill>
+        <p:spPr>
+          <a:xfrm>
+            <a:off x="4846320" y="3383280"/>
+            <a:ext cx="1246466" cy="2697480"/>
+          </a:xfrm>
+          <a:prstGeom prst="rect">
+            <a:avLst/>
+          </a:prstGeom>
+        </p:spPr>
+      </p:pic>
+      <p:sp>
+        <p:nvSpPr>
+          <p:cNvPr id="1025" name="TextBox 1024"/>
+          <p:cNvSpPr txBox="1"/>
+          <p:nvPr/>
+        </p:nvSpPr>
+        <p:spPr>
+          <a:xfrm>
+            <a:off x="4754880" y="6108192"/>
+            <a:ext cx="1828800" cy="256032"/>
+          </a:xfrm>
+          <a:prstGeom prst="rect">
+            <a:avLst/>
+          </a:prstGeom>
+          <a:noFill/>
+        </p:spPr>
+        <p:txBody>
+          <a:bodyPr wrap="none">
+            <a:spAutoFit/>
+          </a:bodyPr>
+          <a:lstStyle/>
+          <a:p>
+            <a:r>
+              <a:rPr sz="900" b="0">
+                <a:solidFill>
+                  <a:srgbClr val="555F58"/>
+                </a:solidFill>
+                <a:latin typeface="맑은 고딕"/>
+                <a:ea typeface="맑은 고딕"/>
+              </a:rPr>
+              <a:t>▲ 큰글씨 모드 결과</a:t>
+            </a:r>
+          </a:p>
+        </p:txBody>
+      </p:sp>
+      <p:pic>
+        <p:nvPicPr>
+          <p:cNvPr id="1026" name="Picture 1025" descr="m3-elderly-offer.png"/>
+          <p:cNvPicPr>
+            <a:picLocks noChangeAspect="1"/>
+          </p:cNvPicPr>
+          <p:nvPr/>
+        </p:nvPicPr>
+        <p:blipFill>
+          <a:blip r:embed="rId6"/>
+          <a:stretch>
+            <a:fillRect/>
+          </a:stretch>
+        </p:blipFill>
+        <p:spPr>
+          <a:xfrm>
+            <a:off x="7772400" y="3383280"/>
+            <a:ext cx="1246466" cy="2697480"/>
+          </a:xfrm>
+          <a:prstGeom prst="rect">
+            <a:avLst/>
+          </a:prstGeom>
+        </p:spPr>
+      </p:pic>
+      <p:sp>
+        <p:nvSpPr>
+          <p:cNvPr id="1027" name="TextBox 1026"/>
+          <p:cNvSpPr txBox="1"/>
+          <p:nvPr/>
+        </p:nvSpPr>
+        <p:spPr>
+          <a:xfrm>
+            <a:off x="7680960" y="6108192"/>
+            <a:ext cx="2011680" cy="256032"/>
+          </a:xfrm>
+          <a:prstGeom prst="rect">
+            <a:avLst/>
+          </a:prstGeom>
+          <a:noFill/>
+        </p:spPr>
+        <p:txBody>
+          <a:bodyPr wrap="none">
+            <a:spAutoFit/>
+          </a:bodyPr>
+          <a:lstStyle/>
+          <a:p>
+            <a:r>
+              <a:rPr sz="900" b="0">
+                <a:solidFill>
+                  <a:srgbClr val="555F58"/>
+                </a:solidFill>
+                <a:latin typeface="맑은 고딕"/>
+                <a:ea typeface="맑은 고딕"/>
+              </a:rPr>
+              <a:t>▲ 어르신 배려 원탭 제안</a:t>
             </a:r>
           </a:p>
         </p:txBody>
